--- a/Async Pitfalls/Async Pitfalls.pptx
+++ b/Async Pitfalls/Async Pitfalls.pptx
@@ -285,7 +285,7 @@
           <a:p>
             <a:fld id="{574E8BCA-0B4F-4373-B78E-3D2899449797}" type="datetimeFigureOut">
               <a:rPr lang="en-US" smtClean="0"/>
-              <a:t>10/26/2025</a:t>
+              <a:t>10/28/2025</a:t>
             </a:fld>
             <a:endParaRPr lang="en-US" dirty="0"/>
           </a:p>
@@ -957,6 +957,23 @@
             <a:r>
               <a:rPr lang="en-US" dirty="0"/>
               <a:t>You can do both async and parallel, but realize they work in different ways!</a:t>
+            </a:r>
+          </a:p>
+          <a:p>
+            <a:endParaRPr lang="en-US" dirty="0"/>
+          </a:p>
+          <a:p>
+            <a:r>
+              <a:rPr lang="en-US" dirty="0"/>
+              <a:t>If you do need to do both: </a:t>
+            </a:r>
+            <a:r>
+              <a:rPr lang="en-US" dirty="0" err="1"/>
+              <a:t>Parallel.ForEachAsync</a:t>
+            </a:r>
+            <a:r>
+              <a:rPr lang="en-US" dirty="0"/>
+              <a:t>.</a:t>
             </a:r>
           </a:p>
         </p:txBody>
@@ -10296,8 +10313,13 @@
             </a:r>
             <a:r>
               <a:rPr lang="en-US" dirty="0"/>
-              <a:t> is not magic.</a:t>
-            </a:r>
+              <a:t> is </a:t>
+            </a:r>
+            <a:r>
+              <a:rPr lang="en-US"/>
+              <a:t>not magic.</a:t>
+            </a:r>
+            <a:endParaRPr lang="en-US" dirty="0"/>
           </a:p>
           <a:p>
             <a:pPr marL="796926" lvl="1" indent="-457200">
@@ -12110,13 +12132,13 @@
   <p:clrMapOvr>
     <a:masterClrMapping/>
   </p:clrMapOvr>
-  <mc:AlternateContent xmlns:mc="http://schemas.openxmlformats.org/markup-compatibility/2006">
-    <mc:Choice xmlns:p14="http://schemas.microsoft.com/office/powerpoint/2010/main" Requires="p14">
+  <mc:AlternateContent xmlns:mc="http://schemas.openxmlformats.org/markup-compatibility/2006" xmlns:p14="http://schemas.microsoft.com/office/powerpoint/2010/main">
+    <mc:Choice Requires="p14">
       <p:transition spd="slow" p14:dur="3400">
         <p14:reveal/>
       </p:transition>
     </mc:Choice>
-    <mc:Fallback>
+    <mc:Fallback xmlns="">
       <p:transition spd="slow">
         <p:fade/>
       </p:transition>
